--- a/docs/pitch-decks/gamma/pptx/01-investor-overview.pptx
+++ b/docs/pitch-decks/gamma/pptx/01-investor-overview.pptx
@@ -4313,7 +4313,7 @@
             <a:off x="5303520" y="1097280"/>
             <a:ext cx="6400800" cy="4846320"/>
           </a:xfrm>
-          <a:prstGeom prst="ellipse">
+          <a:prstGeom prst="rect">
             <a:avLst/>
           </a:prstGeom>
         </p:spPr>
@@ -4661,7 +4661,7 @@
             <a:off x="5303520" y="1097280"/>
             <a:ext cx="6400800" cy="4846320"/>
           </a:xfrm>
-          <a:prstGeom prst="ellipse">
+          <a:prstGeom prst="rect">
             <a:avLst/>
           </a:prstGeom>
         </p:spPr>

--- a/docs/pitch-decks/gamma/pptx/01-investor-overview.pptx
+++ b/docs/pitch-decks/gamma/pptx/01-investor-overview.pptx
@@ -4296,7 +4296,7 @@
       </p:sp>
       <p:pic>
         <p:nvPicPr>
-          <p:cNvPr id="7" name="Image 0" descr="C:\Users\User\datacendia-core\docs\pitch-decks\screenshots\02-council-deliberation.png">    </p:cNvPr>
+          <p:cNvPr id="7" name="Image 0" descr="preencoded.png">    </p:cNvPr>
           <p:cNvPicPr>
             <a:picLocks noChangeAspect="1"/>
           </p:cNvPicPr>
@@ -4644,7 +4644,7 @@
       </p:sp>
       <p:pic>
         <p:nvPicPr>
-          <p:cNvPr id="7" name="Image 0" descr="C:\Users\User\datacendia-core\docs\pitch-decks\screenshots\05-decisions.png">    </p:cNvPr>
+          <p:cNvPr id="7" name="Image 0" descr="preencoded.png">    </p:cNvPr>
           <p:cNvPicPr>
             <a:picLocks noChangeAspect="1"/>
           </p:cNvPicPr>

--- a/docs/pitch-decks/gamma/pptx/01-investor-overview.pptx
+++ b/docs/pitch-decks/gamma/pptx/01-investor-overview.pptx
@@ -2466,6 +2466,30 @@
           </a:p>
         </p:txBody>
       </p:sp>
+      <p:pic>
+        <p:nvPicPr>
+          <p:cNvPr id="9" name="Picture 8" descr="07-graph-explorer.png"/>
+          <p:cNvPicPr>
+            <a:picLocks noChangeAspect="1"/>
+          </p:cNvPicPr>
+          <p:nvPr/>
+        </p:nvPicPr>
+        <p:blipFill>
+          <a:blip r:embed="rId3"/>
+          <a:stretch>
+            <a:fillRect/>
+          </a:stretch>
+        </p:blipFill>
+        <p:spPr>
+          <a:xfrm>
+            <a:off x="6885432" y="1371600"/>
+            <a:ext cx="5029200" cy="3108960"/>
+          </a:xfrm>
+          <a:prstGeom prst="rect">
+            <a:avLst/>
+          </a:prstGeom>
+        </p:spPr>
+      </p:pic>
     </p:spTree>
   </p:cSld>
   <p:clrMapOvr>
@@ -2844,6 +2868,30 @@
           </a:p>
         </p:txBody>
       </p:sp>
+      <p:pic>
+        <p:nvPicPr>
+          <p:cNvPr id="8" name="Picture 7" descr="image.png"/>
+          <p:cNvPicPr>
+            <a:picLocks noChangeAspect="1"/>
+          </p:cNvPicPr>
+          <p:nvPr/>
+        </p:nvPicPr>
+        <p:blipFill>
+          <a:blip r:embed="rId3"/>
+          <a:stretch>
+            <a:fillRect/>
+          </a:stretch>
+        </p:blipFill>
+        <p:spPr>
+          <a:xfrm>
+            <a:off x="6885432" y="1371600"/>
+            <a:ext cx="5029200" cy="3108960"/>
+          </a:xfrm>
+          <a:prstGeom prst="rect">
+            <a:avLst/>
+          </a:prstGeom>
+        </p:spPr>
+      </p:pic>
     </p:spTree>
   </p:cSld>
   <p:clrMapOvr>
@@ -3258,6 +3306,30 @@
           </a:p>
         </p:txBody>
       </p:sp>
+      <p:pic>
+        <p:nvPicPr>
+          <p:cNvPr id="9" name="Picture 8" descr="image.png"/>
+          <p:cNvPicPr>
+            <a:picLocks noChangeAspect="1"/>
+          </p:cNvPicPr>
+          <p:nvPr/>
+        </p:nvPicPr>
+        <p:blipFill>
+          <a:blip r:embed="rId3"/>
+          <a:stretch>
+            <a:fillRect/>
+          </a:stretch>
+        </p:blipFill>
+        <p:spPr>
+          <a:xfrm>
+            <a:off x="6885432" y="1371600"/>
+            <a:ext cx="5029200" cy="3108960"/>
+          </a:xfrm>
+          <a:prstGeom prst="rect">
+            <a:avLst/>
+          </a:prstGeom>
+        </p:spPr>
+      </p:pic>
     </p:spTree>
   </p:cSld>
   <p:clrMapOvr>
@@ -3794,6 +3866,30 @@
           </a:p>
         </p:txBody>
       </p:sp>
+      <p:pic>
+        <p:nvPicPr>
+          <p:cNvPr id="9" name="Picture 8" descr="30-compliance-readiness.png"/>
+          <p:cNvPicPr>
+            <a:picLocks noChangeAspect="1"/>
+          </p:cNvPicPr>
+          <p:nvPr/>
+        </p:nvPicPr>
+        <p:blipFill>
+          <a:blip r:embed="rId3"/>
+          <a:stretch>
+            <a:fillRect/>
+          </a:stretch>
+        </p:blipFill>
+        <p:spPr>
+          <a:xfrm>
+            <a:off x="6885432" y="1371600"/>
+            <a:ext cx="5029200" cy="3108960"/>
+          </a:xfrm>
+          <a:prstGeom prst="rect">
+            <a:avLst/>
+          </a:prstGeom>
+        </p:spPr>
+      </p:pic>
     </p:spTree>
   </p:cSld>
   <p:clrMapOvr>
@@ -4294,9 +4390,81 @@
           </a:p>
         </p:txBody>
       </p:sp>
+      <p:sp>
+        <p:nvSpPr>
+          <p:cNvPr id="8" name="Text 5"/>
+          <p:cNvSpPr/>
+          <p:nvPr/>
+        </p:nvSpPr>
+        <p:spPr>
+          <a:xfrm>
+            <a:off x="457200" y="6400800"/>
+            <a:ext cx="3657600" cy="274320"/>
+          </a:xfrm>
+          <a:prstGeom prst="rect">
+            <a:avLst/>
+          </a:prstGeom>
+          <a:noFill/>
+          <a:ln/>
+        </p:spPr>
+        <p:txBody>
+          <a:bodyPr wrap="square" rtlCol="0" anchor="ctr"/>
+          <a:lstStyle/>
+          <a:p>
+            <a:pPr indent="0" marL="0">
+              <a:buNone/>
+            </a:pPr>
+            <a:r>
+              <a:rPr lang="en-US" sz="800" dirty="0">
+                <a:solidFill>
+                  <a:srgbClr val="8B8FA3"/>
+                </a:solidFill>
+              </a:rPr>
+              <a:t>© 2024-2026 Datacendia, LLC</a:t>
+            </a:r>
+            <a:endParaRPr lang="en-US" sz="800" dirty="0"/>
+          </a:p>
+        </p:txBody>
+      </p:sp>
+      <p:sp>
+        <p:nvSpPr>
+          <p:cNvPr id="9" name="Text 6"/>
+          <p:cNvSpPr/>
+          <p:nvPr/>
+        </p:nvSpPr>
+        <p:spPr>
+          <a:xfrm>
+            <a:off x="8229600" y="6400800"/>
+            <a:ext cx="3657600" cy="274320"/>
+          </a:xfrm>
+          <a:prstGeom prst="rect">
+            <a:avLst/>
+          </a:prstGeom>
+          <a:noFill/>
+          <a:ln/>
+        </p:spPr>
+        <p:txBody>
+          <a:bodyPr wrap="square" rtlCol="0" anchor="ctr"/>
+          <a:lstStyle/>
+          <a:p>
+            <a:pPr algn="r" indent="0" marL="0">
+              <a:buNone/>
+            </a:pPr>
+            <a:r>
+              <a:rPr lang="en-US" sz="800" dirty="0">
+                <a:solidFill>
+                  <a:srgbClr val="8B8FA3"/>
+                </a:solidFill>
+              </a:rPr>
+              <a:t>datacendia.com</a:t>
+            </a:r>
+            <a:endParaRPr lang="en-US" sz="800" dirty="0"/>
+          </a:p>
+        </p:txBody>
+      </p:sp>
       <p:pic>
         <p:nvPicPr>
-          <p:cNvPr id="7" name="Image 0" descr="preencoded.png">    </p:cNvPr>
+          <p:cNvPr id="10" name="Picture 9" descr="image.png"/>
           <p:cNvPicPr>
             <a:picLocks noChangeAspect="1"/>
           </p:cNvPicPr>
@@ -4310,86 +4478,14 @@
         </p:blipFill>
         <p:spPr>
           <a:xfrm>
-            <a:off x="5303520" y="1097280"/>
-            <a:ext cx="6400800" cy="4846320"/>
+            <a:off x="6885432" y="1371600"/>
+            <a:ext cx="5029200" cy="3108960"/>
           </a:xfrm>
           <a:prstGeom prst="rect">
             <a:avLst/>
           </a:prstGeom>
         </p:spPr>
       </p:pic>
-      <p:sp>
-        <p:nvSpPr>
-          <p:cNvPr id="8" name="Text 5"/>
-          <p:cNvSpPr/>
-          <p:nvPr/>
-        </p:nvSpPr>
-        <p:spPr>
-          <a:xfrm>
-            <a:off x="457200" y="6400800"/>
-            <a:ext cx="3657600" cy="274320"/>
-          </a:xfrm>
-          <a:prstGeom prst="rect">
-            <a:avLst/>
-          </a:prstGeom>
-          <a:noFill/>
-          <a:ln/>
-        </p:spPr>
-        <p:txBody>
-          <a:bodyPr wrap="square" rtlCol="0" anchor="ctr"/>
-          <a:lstStyle/>
-          <a:p>
-            <a:pPr indent="0" marL="0">
-              <a:buNone/>
-            </a:pPr>
-            <a:r>
-              <a:rPr lang="en-US" sz="800" dirty="0">
-                <a:solidFill>
-                  <a:srgbClr val="8B8FA3"/>
-                </a:solidFill>
-              </a:rPr>
-              <a:t>© 2024-2026 Datacendia, LLC</a:t>
-            </a:r>
-            <a:endParaRPr lang="en-US" sz="800" dirty="0"/>
-          </a:p>
-        </p:txBody>
-      </p:sp>
-      <p:sp>
-        <p:nvSpPr>
-          <p:cNvPr id="9" name="Text 6"/>
-          <p:cNvSpPr/>
-          <p:nvPr/>
-        </p:nvSpPr>
-        <p:spPr>
-          <a:xfrm>
-            <a:off x="8229600" y="6400800"/>
-            <a:ext cx="3657600" cy="274320"/>
-          </a:xfrm>
-          <a:prstGeom prst="rect">
-            <a:avLst/>
-          </a:prstGeom>
-          <a:noFill/>
-          <a:ln/>
-        </p:spPr>
-        <p:txBody>
-          <a:bodyPr wrap="square" rtlCol="0" anchor="ctr"/>
-          <a:lstStyle/>
-          <a:p>
-            <a:pPr algn="r" indent="0" marL="0">
-              <a:buNone/>
-            </a:pPr>
-            <a:r>
-              <a:rPr lang="en-US" sz="800" dirty="0">
-                <a:solidFill>
-                  <a:srgbClr val="8B8FA3"/>
-                </a:solidFill>
-              </a:rPr>
-              <a:t>datacendia.com</a:t>
-            </a:r>
-            <a:endParaRPr lang="en-US" sz="800" dirty="0"/>
-          </a:p>
-        </p:txBody>
-      </p:sp>
     </p:spTree>
   </p:cSld>
   <p:clrMapOvr>
@@ -4642,9 +4738,81 @@
           </a:p>
         </p:txBody>
       </p:sp>
+      <p:sp>
+        <p:nvSpPr>
+          <p:cNvPr id="8" name="Text 5"/>
+          <p:cNvSpPr/>
+          <p:nvPr/>
+        </p:nvSpPr>
+        <p:spPr>
+          <a:xfrm>
+            <a:off x="457200" y="6400800"/>
+            <a:ext cx="3657600" cy="274320"/>
+          </a:xfrm>
+          <a:prstGeom prst="rect">
+            <a:avLst/>
+          </a:prstGeom>
+          <a:noFill/>
+          <a:ln/>
+        </p:spPr>
+        <p:txBody>
+          <a:bodyPr wrap="square" rtlCol="0" anchor="ctr"/>
+          <a:lstStyle/>
+          <a:p>
+            <a:pPr indent="0" marL="0">
+              <a:buNone/>
+            </a:pPr>
+            <a:r>
+              <a:rPr lang="en-US" sz="800" dirty="0">
+                <a:solidFill>
+                  <a:srgbClr val="8B8FA3"/>
+                </a:solidFill>
+              </a:rPr>
+              <a:t>© 2024-2026 Datacendia, LLC</a:t>
+            </a:r>
+            <a:endParaRPr lang="en-US" sz="800" dirty="0"/>
+          </a:p>
+        </p:txBody>
+      </p:sp>
+      <p:sp>
+        <p:nvSpPr>
+          <p:cNvPr id="9" name="Text 6"/>
+          <p:cNvSpPr/>
+          <p:nvPr/>
+        </p:nvSpPr>
+        <p:spPr>
+          <a:xfrm>
+            <a:off x="8229600" y="6400800"/>
+            <a:ext cx="3657600" cy="274320"/>
+          </a:xfrm>
+          <a:prstGeom prst="rect">
+            <a:avLst/>
+          </a:prstGeom>
+          <a:noFill/>
+          <a:ln/>
+        </p:spPr>
+        <p:txBody>
+          <a:bodyPr wrap="square" rtlCol="0" anchor="ctr"/>
+          <a:lstStyle/>
+          <a:p>
+            <a:pPr algn="r" indent="0" marL="0">
+              <a:buNone/>
+            </a:pPr>
+            <a:r>
+              <a:rPr lang="en-US" sz="800" dirty="0">
+                <a:solidFill>
+                  <a:srgbClr val="8B8FA3"/>
+                </a:solidFill>
+              </a:rPr>
+              <a:t>datacendia.com</a:t>
+            </a:r>
+            <a:endParaRPr lang="en-US" sz="800" dirty="0"/>
+          </a:p>
+        </p:txBody>
+      </p:sp>
       <p:pic>
         <p:nvPicPr>
-          <p:cNvPr id="7" name="Image 0" descr="preencoded.png">    </p:cNvPr>
+          <p:cNvPr id="10" name="Picture 9" descr="image.png"/>
           <p:cNvPicPr>
             <a:picLocks noChangeAspect="1"/>
           </p:cNvPicPr>
@@ -4658,86 +4826,14 @@
         </p:blipFill>
         <p:spPr>
           <a:xfrm>
-            <a:off x="5303520" y="1097280"/>
-            <a:ext cx="6400800" cy="4846320"/>
+            <a:off x="6885432" y="1371600"/>
+            <a:ext cx="5029200" cy="3108960"/>
           </a:xfrm>
           <a:prstGeom prst="rect">
             <a:avLst/>
           </a:prstGeom>
         </p:spPr>
       </p:pic>
-      <p:sp>
-        <p:nvSpPr>
-          <p:cNvPr id="8" name="Text 5"/>
-          <p:cNvSpPr/>
-          <p:nvPr/>
-        </p:nvSpPr>
-        <p:spPr>
-          <a:xfrm>
-            <a:off x="457200" y="6400800"/>
-            <a:ext cx="3657600" cy="274320"/>
-          </a:xfrm>
-          <a:prstGeom prst="rect">
-            <a:avLst/>
-          </a:prstGeom>
-          <a:noFill/>
-          <a:ln/>
-        </p:spPr>
-        <p:txBody>
-          <a:bodyPr wrap="square" rtlCol="0" anchor="ctr"/>
-          <a:lstStyle/>
-          <a:p>
-            <a:pPr indent="0" marL="0">
-              <a:buNone/>
-            </a:pPr>
-            <a:r>
-              <a:rPr lang="en-US" sz="800" dirty="0">
-                <a:solidFill>
-                  <a:srgbClr val="8B8FA3"/>
-                </a:solidFill>
-              </a:rPr>
-              <a:t>© 2024-2026 Datacendia, LLC</a:t>
-            </a:r>
-            <a:endParaRPr lang="en-US" sz="800" dirty="0"/>
-          </a:p>
-        </p:txBody>
-      </p:sp>
-      <p:sp>
-        <p:nvSpPr>
-          <p:cNvPr id="9" name="Text 6"/>
-          <p:cNvSpPr/>
-          <p:nvPr/>
-        </p:nvSpPr>
-        <p:spPr>
-          <a:xfrm>
-            <a:off x="8229600" y="6400800"/>
-            <a:ext cx="3657600" cy="274320"/>
-          </a:xfrm>
-          <a:prstGeom prst="rect">
-            <a:avLst/>
-          </a:prstGeom>
-          <a:noFill/>
-          <a:ln/>
-        </p:spPr>
-        <p:txBody>
-          <a:bodyPr wrap="square" rtlCol="0" anchor="ctr"/>
-          <a:lstStyle/>
-          <a:p>
-            <a:pPr algn="r" indent="0" marL="0">
-              <a:buNone/>
-            </a:pPr>
-            <a:r>
-              <a:rPr lang="en-US" sz="800" dirty="0">
-                <a:solidFill>
-                  <a:srgbClr val="8B8FA3"/>
-                </a:solidFill>
-              </a:rPr>
-              <a:t>datacendia.com</a:t>
-            </a:r>
-            <a:endParaRPr lang="en-US" sz="800" dirty="0"/>
-          </a:p>
-        </p:txBody>
-      </p:sp>
     </p:spTree>
   </p:cSld>
   <p:clrMapOvr>
@@ -5134,6 +5230,30 @@
           </a:p>
         </p:txBody>
       </p:sp>
+      <p:pic>
+        <p:nvPicPr>
+          <p:cNvPr id="9" name="Picture 8" descr="image.png"/>
+          <p:cNvPicPr>
+            <a:picLocks noChangeAspect="1"/>
+          </p:cNvPicPr>
+          <p:nvPr/>
+        </p:nvPicPr>
+        <p:blipFill>
+          <a:blip r:embed="rId3"/>
+          <a:stretch>
+            <a:fillRect/>
+          </a:stretch>
+        </p:blipFill>
+        <p:spPr>
+          <a:xfrm>
+            <a:off x="6885432" y="1371600"/>
+            <a:ext cx="5029200" cy="3108960"/>
+          </a:xfrm>
+          <a:prstGeom prst="rect">
+            <a:avLst/>
+          </a:prstGeom>
+        </p:spPr>
+      </p:pic>
     </p:spTree>
   </p:cSld>
   <p:clrMapOvr>
@@ -5494,6 +5614,30 @@
           </a:p>
         </p:txBody>
       </p:sp>
+      <p:pic>
+        <p:nvPicPr>
+          <p:cNvPr id="8" name="Picture 7" descr="15-chronos.png"/>
+          <p:cNvPicPr>
+            <a:picLocks noChangeAspect="1"/>
+          </p:cNvPicPr>
+          <p:nvPr/>
+        </p:nvPicPr>
+        <p:blipFill>
+          <a:blip r:embed="rId3"/>
+          <a:stretch>
+            <a:fillRect/>
+          </a:stretch>
+        </p:blipFill>
+        <p:spPr>
+          <a:xfrm>
+            <a:off x="6885432" y="1371600"/>
+            <a:ext cx="5029200" cy="3108960"/>
+          </a:xfrm>
+          <a:prstGeom prst="rect">
+            <a:avLst/>
+          </a:prstGeom>
+        </p:spPr>
+      </p:pic>
     </p:spTree>
   </p:cSld>
   <p:clrMapOvr>
@@ -5742,6 +5886,30 @@
           </a:p>
         </p:txBody>
       </p:sp>
+      <p:pic>
+        <p:nvPicPr>
+          <p:cNvPr id="8" name="Picture 7" descr="image.png"/>
+          <p:cNvPicPr>
+            <a:picLocks noChangeAspect="1"/>
+          </p:cNvPicPr>
+          <p:nvPr/>
+        </p:nvPicPr>
+        <p:blipFill>
+          <a:blip r:embed="rId3"/>
+          <a:stretch>
+            <a:fillRect/>
+          </a:stretch>
+        </p:blipFill>
+        <p:spPr>
+          <a:xfrm>
+            <a:off x="6885432" y="1371600"/>
+            <a:ext cx="5029200" cy="3108960"/>
+          </a:xfrm>
+          <a:prstGeom prst="rect">
+            <a:avLst/>
+          </a:prstGeom>
+        </p:spPr>
+      </p:pic>
     </p:spTree>
   </p:cSld>
   <p:clrMapOvr>
@@ -5939,6 +6107,10 @@
           </a:solidFill>
           <a:ln/>
         </p:spPr>
+        <p:txBody>
+          <a:bodyPr/>
+          <a:p/>
+        </p:txBody>
       </p:sp>
       <p:sp>
         <p:nvSpPr>
@@ -6033,6 +6205,10 @@
           </a:solidFill>
           <a:ln/>
         </p:spPr>
+        <p:txBody>
+          <a:bodyPr/>
+          <a:p/>
+        </p:txBody>
       </p:sp>
       <p:sp>
         <p:nvSpPr>
@@ -6127,6 +6303,10 @@
           </a:solidFill>
           <a:ln/>
         </p:spPr>
+        <p:txBody>
+          <a:bodyPr/>
+          <a:p/>
+        </p:txBody>
       </p:sp>
       <p:sp>
         <p:nvSpPr>
@@ -6221,6 +6401,10 @@
           </a:solidFill>
           <a:ln/>
         </p:spPr>
+        <p:txBody>
+          <a:bodyPr/>
+          <a:p/>
+        </p:txBody>
       </p:sp>
       <p:sp>
         <p:nvSpPr>
@@ -6315,6 +6499,10 @@
           </a:solidFill>
           <a:ln/>
         </p:spPr>
+        <p:txBody>
+          <a:bodyPr/>
+          <a:p/>
+        </p:txBody>
       </p:sp>
       <p:sp>
         <p:nvSpPr>
@@ -6409,6 +6597,10 @@
           </a:solidFill>
           <a:ln/>
         </p:spPr>
+        <p:txBody>
+          <a:bodyPr/>
+          <a:p/>
+        </p:txBody>
       </p:sp>
       <p:sp>
         <p:nvSpPr>
@@ -6503,6 +6695,10 @@
           </a:solidFill>
           <a:ln/>
         </p:spPr>
+        <p:txBody>
+          <a:bodyPr/>
+          <a:p/>
+        </p:txBody>
       </p:sp>
       <p:sp>
         <p:nvSpPr>
@@ -6597,6 +6793,10 @@
           </a:solidFill>
           <a:ln/>
         </p:spPr>
+        <p:txBody>
+          <a:bodyPr/>
+          <a:p/>
+        </p:txBody>
       </p:sp>
       <p:sp>
         <p:nvSpPr>
@@ -6742,6 +6942,30 @@
           </a:p>
         </p:txBody>
       </p:sp>
+      <p:pic>
+        <p:nvPicPr>
+          <p:cNvPr id="32" name="Picture 31" descr="image.png"/>
+          <p:cNvPicPr>
+            <a:picLocks noChangeAspect="1"/>
+          </p:cNvPicPr>
+          <p:nvPr/>
+        </p:nvPicPr>
+        <p:blipFill>
+          <a:blip r:embed="rId3"/>
+          <a:stretch>
+            <a:fillRect/>
+          </a:stretch>
+        </p:blipFill>
+        <p:spPr>
+          <a:xfrm>
+            <a:off x="6885432" y="1371600"/>
+            <a:ext cx="5029200" cy="3108960"/>
+          </a:xfrm>
+          <a:prstGeom prst="rect">
+            <a:avLst/>
+          </a:prstGeom>
+        </p:spPr>
+      </p:pic>
     </p:spTree>
   </p:cSld>
   <p:clrMapOvr>
@@ -7066,6 +7290,30 @@
           </a:p>
         </p:txBody>
       </p:sp>
+      <p:pic>
+        <p:nvPicPr>
+          <p:cNvPr id="9" name="Picture 8" descr="16-redteam.png"/>
+          <p:cNvPicPr>
+            <a:picLocks noChangeAspect="1"/>
+          </p:cNvPicPr>
+          <p:nvPr/>
+        </p:nvPicPr>
+        <p:blipFill>
+          <a:blip r:embed="rId3"/>
+          <a:stretch>
+            <a:fillRect/>
+          </a:stretch>
+        </p:blipFill>
+        <p:spPr>
+          <a:xfrm>
+            <a:off x="6885432" y="1371600"/>
+            <a:ext cx="5029200" cy="3108960"/>
+          </a:xfrm>
+          <a:prstGeom prst="rect">
+            <a:avLst/>
+          </a:prstGeom>
+        </p:spPr>
+      </p:pic>
     </p:spTree>
   </p:cSld>
   <p:clrMapOvr>
@@ -7602,6 +7850,30 @@
           </a:p>
         </p:txBody>
       </p:sp>
+      <p:pic>
+        <p:nvPicPr>
+          <p:cNvPr id="8" name="Picture 7" descr="31-sovereign.png"/>
+          <p:cNvPicPr>
+            <a:picLocks noChangeAspect="1"/>
+          </p:cNvPicPr>
+          <p:nvPr/>
+        </p:nvPicPr>
+        <p:blipFill>
+          <a:blip r:embed="rId3"/>
+          <a:stretch>
+            <a:fillRect/>
+          </a:stretch>
+        </p:blipFill>
+        <p:spPr>
+          <a:xfrm>
+            <a:off x="6885432" y="1371600"/>
+            <a:ext cx="5029200" cy="3108960"/>
+          </a:xfrm>
+          <a:prstGeom prst="rect">
+            <a:avLst/>
+          </a:prstGeom>
+        </p:spPr>
+      </p:pic>
     </p:spTree>
   </p:cSld>
   <p:clrMapOvr>

--- a/docs/pitch-decks/gamma/pptx/01-investor-overview.pptx
+++ b/docs/pitch-decks/gamma/pptx/01-investor-overview.pptx
@@ -2466,30 +2466,6 @@
           </a:p>
         </p:txBody>
       </p:sp>
-      <p:pic>
-        <p:nvPicPr>
-          <p:cNvPr id="9" name="Picture 8" descr="07-graph-explorer.png"/>
-          <p:cNvPicPr>
-            <a:picLocks noChangeAspect="1"/>
-          </p:cNvPicPr>
-          <p:nvPr/>
-        </p:nvPicPr>
-        <p:blipFill>
-          <a:blip r:embed="rId3"/>
-          <a:stretch>
-            <a:fillRect/>
-          </a:stretch>
-        </p:blipFill>
-        <p:spPr>
-          <a:xfrm>
-            <a:off x="6885432" y="1371600"/>
-            <a:ext cx="5029200" cy="3108960"/>
-          </a:xfrm>
-          <a:prstGeom prst="rect">
-            <a:avLst/>
-          </a:prstGeom>
-        </p:spPr>
-      </p:pic>
     </p:spTree>
   </p:cSld>
   <p:clrMapOvr>
@@ -2868,30 +2844,6 @@
           </a:p>
         </p:txBody>
       </p:sp>
-      <p:pic>
-        <p:nvPicPr>
-          <p:cNvPr id="8" name="Picture 7" descr="image.png"/>
-          <p:cNvPicPr>
-            <a:picLocks noChangeAspect="1"/>
-          </p:cNvPicPr>
-          <p:nvPr/>
-        </p:nvPicPr>
-        <p:blipFill>
-          <a:blip r:embed="rId3"/>
-          <a:stretch>
-            <a:fillRect/>
-          </a:stretch>
-        </p:blipFill>
-        <p:spPr>
-          <a:xfrm>
-            <a:off x="6885432" y="1371600"/>
-            <a:ext cx="5029200" cy="3108960"/>
-          </a:xfrm>
-          <a:prstGeom prst="rect">
-            <a:avLst/>
-          </a:prstGeom>
-        </p:spPr>
-      </p:pic>
     </p:spTree>
   </p:cSld>
   <p:clrMapOvr>
@@ -3306,30 +3258,6 @@
           </a:p>
         </p:txBody>
       </p:sp>
-      <p:pic>
-        <p:nvPicPr>
-          <p:cNvPr id="9" name="Picture 8" descr="image.png"/>
-          <p:cNvPicPr>
-            <a:picLocks noChangeAspect="1"/>
-          </p:cNvPicPr>
-          <p:nvPr/>
-        </p:nvPicPr>
-        <p:blipFill>
-          <a:blip r:embed="rId3"/>
-          <a:stretch>
-            <a:fillRect/>
-          </a:stretch>
-        </p:blipFill>
-        <p:spPr>
-          <a:xfrm>
-            <a:off x="6885432" y="1371600"/>
-            <a:ext cx="5029200" cy="3108960"/>
-          </a:xfrm>
-          <a:prstGeom prst="rect">
-            <a:avLst/>
-          </a:prstGeom>
-        </p:spPr>
-      </p:pic>
     </p:spTree>
   </p:cSld>
   <p:clrMapOvr>
@@ -3866,30 +3794,6 @@
           </a:p>
         </p:txBody>
       </p:sp>
-      <p:pic>
-        <p:nvPicPr>
-          <p:cNvPr id="9" name="Picture 8" descr="30-compliance-readiness.png"/>
-          <p:cNvPicPr>
-            <a:picLocks noChangeAspect="1"/>
-          </p:cNvPicPr>
-          <p:nvPr/>
-        </p:nvPicPr>
-        <p:blipFill>
-          <a:blip r:embed="rId3"/>
-          <a:stretch>
-            <a:fillRect/>
-          </a:stretch>
-        </p:blipFill>
-        <p:spPr>
-          <a:xfrm>
-            <a:off x="6885432" y="1371600"/>
-            <a:ext cx="5029200" cy="3108960"/>
-          </a:xfrm>
-          <a:prstGeom prst="rect">
-            <a:avLst/>
-          </a:prstGeom>
-        </p:spPr>
-      </p:pic>
     </p:spTree>
   </p:cSld>
   <p:clrMapOvr>
@@ -4390,81 +4294,9 @@
           </a:p>
         </p:txBody>
       </p:sp>
-      <p:sp>
-        <p:nvSpPr>
-          <p:cNvPr id="8" name="Text 5"/>
-          <p:cNvSpPr/>
-          <p:nvPr/>
-        </p:nvSpPr>
-        <p:spPr>
-          <a:xfrm>
-            <a:off x="457200" y="6400800"/>
-            <a:ext cx="3657600" cy="274320"/>
-          </a:xfrm>
-          <a:prstGeom prst="rect">
-            <a:avLst/>
-          </a:prstGeom>
-          <a:noFill/>
-          <a:ln/>
-        </p:spPr>
-        <p:txBody>
-          <a:bodyPr wrap="square" rtlCol="0" anchor="ctr"/>
-          <a:lstStyle/>
-          <a:p>
-            <a:pPr indent="0" marL="0">
-              <a:buNone/>
-            </a:pPr>
-            <a:r>
-              <a:rPr lang="en-US" sz="800" dirty="0">
-                <a:solidFill>
-                  <a:srgbClr val="8B8FA3"/>
-                </a:solidFill>
-              </a:rPr>
-              <a:t>© 2024-2026 Datacendia, LLC</a:t>
-            </a:r>
-            <a:endParaRPr lang="en-US" sz="800" dirty="0"/>
-          </a:p>
-        </p:txBody>
-      </p:sp>
-      <p:sp>
-        <p:nvSpPr>
-          <p:cNvPr id="9" name="Text 6"/>
-          <p:cNvSpPr/>
-          <p:nvPr/>
-        </p:nvSpPr>
-        <p:spPr>
-          <a:xfrm>
-            <a:off x="8229600" y="6400800"/>
-            <a:ext cx="3657600" cy="274320"/>
-          </a:xfrm>
-          <a:prstGeom prst="rect">
-            <a:avLst/>
-          </a:prstGeom>
-          <a:noFill/>
-          <a:ln/>
-        </p:spPr>
-        <p:txBody>
-          <a:bodyPr wrap="square" rtlCol="0" anchor="ctr"/>
-          <a:lstStyle/>
-          <a:p>
-            <a:pPr algn="r" indent="0" marL="0">
-              <a:buNone/>
-            </a:pPr>
-            <a:r>
-              <a:rPr lang="en-US" sz="800" dirty="0">
-                <a:solidFill>
-                  <a:srgbClr val="8B8FA3"/>
-                </a:solidFill>
-              </a:rPr>
-              <a:t>datacendia.com</a:t>
-            </a:r>
-            <a:endParaRPr lang="en-US" sz="800" dirty="0"/>
-          </a:p>
-        </p:txBody>
-      </p:sp>
       <p:pic>
         <p:nvPicPr>
-          <p:cNvPr id="10" name="Picture 9" descr="image.png"/>
+          <p:cNvPr id="7" name="Image 0" descr="preencoded.png">    </p:cNvPr>
           <p:cNvPicPr>
             <a:picLocks noChangeAspect="1"/>
           </p:cNvPicPr>
@@ -4478,14 +4310,86 @@
         </p:blipFill>
         <p:spPr>
           <a:xfrm>
-            <a:off x="6885432" y="1371600"/>
-            <a:ext cx="5029200" cy="3108960"/>
+            <a:off x="5303520" y="1097280"/>
+            <a:ext cx="6400800" cy="4846320"/>
           </a:xfrm>
           <a:prstGeom prst="rect">
             <a:avLst/>
           </a:prstGeom>
         </p:spPr>
       </p:pic>
+      <p:sp>
+        <p:nvSpPr>
+          <p:cNvPr id="8" name="Text 5"/>
+          <p:cNvSpPr/>
+          <p:nvPr/>
+        </p:nvSpPr>
+        <p:spPr>
+          <a:xfrm>
+            <a:off x="457200" y="6400800"/>
+            <a:ext cx="3657600" cy="274320"/>
+          </a:xfrm>
+          <a:prstGeom prst="rect">
+            <a:avLst/>
+          </a:prstGeom>
+          <a:noFill/>
+          <a:ln/>
+        </p:spPr>
+        <p:txBody>
+          <a:bodyPr wrap="square" rtlCol="0" anchor="ctr"/>
+          <a:lstStyle/>
+          <a:p>
+            <a:pPr indent="0" marL="0">
+              <a:buNone/>
+            </a:pPr>
+            <a:r>
+              <a:rPr lang="en-US" sz="800" dirty="0">
+                <a:solidFill>
+                  <a:srgbClr val="8B8FA3"/>
+                </a:solidFill>
+              </a:rPr>
+              <a:t>© 2024-2026 Datacendia, LLC</a:t>
+            </a:r>
+            <a:endParaRPr lang="en-US" sz="800" dirty="0"/>
+          </a:p>
+        </p:txBody>
+      </p:sp>
+      <p:sp>
+        <p:nvSpPr>
+          <p:cNvPr id="9" name="Text 6"/>
+          <p:cNvSpPr/>
+          <p:nvPr/>
+        </p:nvSpPr>
+        <p:spPr>
+          <a:xfrm>
+            <a:off x="8229600" y="6400800"/>
+            <a:ext cx="3657600" cy="274320"/>
+          </a:xfrm>
+          <a:prstGeom prst="rect">
+            <a:avLst/>
+          </a:prstGeom>
+          <a:noFill/>
+          <a:ln/>
+        </p:spPr>
+        <p:txBody>
+          <a:bodyPr wrap="square" rtlCol="0" anchor="ctr"/>
+          <a:lstStyle/>
+          <a:p>
+            <a:pPr algn="r" indent="0" marL="0">
+              <a:buNone/>
+            </a:pPr>
+            <a:r>
+              <a:rPr lang="en-US" sz="800" dirty="0">
+                <a:solidFill>
+                  <a:srgbClr val="8B8FA3"/>
+                </a:solidFill>
+              </a:rPr>
+              <a:t>datacendia.com</a:t>
+            </a:r>
+            <a:endParaRPr lang="en-US" sz="800" dirty="0"/>
+          </a:p>
+        </p:txBody>
+      </p:sp>
     </p:spTree>
   </p:cSld>
   <p:clrMapOvr>
@@ -4738,81 +4642,9 @@
           </a:p>
         </p:txBody>
       </p:sp>
-      <p:sp>
-        <p:nvSpPr>
-          <p:cNvPr id="8" name="Text 5"/>
-          <p:cNvSpPr/>
-          <p:nvPr/>
-        </p:nvSpPr>
-        <p:spPr>
-          <a:xfrm>
-            <a:off x="457200" y="6400800"/>
-            <a:ext cx="3657600" cy="274320"/>
-          </a:xfrm>
-          <a:prstGeom prst="rect">
-            <a:avLst/>
-          </a:prstGeom>
-          <a:noFill/>
-          <a:ln/>
-        </p:spPr>
-        <p:txBody>
-          <a:bodyPr wrap="square" rtlCol="0" anchor="ctr"/>
-          <a:lstStyle/>
-          <a:p>
-            <a:pPr indent="0" marL="0">
-              <a:buNone/>
-            </a:pPr>
-            <a:r>
-              <a:rPr lang="en-US" sz="800" dirty="0">
-                <a:solidFill>
-                  <a:srgbClr val="8B8FA3"/>
-                </a:solidFill>
-              </a:rPr>
-              <a:t>© 2024-2026 Datacendia, LLC</a:t>
-            </a:r>
-            <a:endParaRPr lang="en-US" sz="800" dirty="0"/>
-          </a:p>
-        </p:txBody>
-      </p:sp>
-      <p:sp>
-        <p:nvSpPr>
-          <p:cNvPr id="9" name="Text 6"/>
-          <p:cNvSpPr/>
-          <p:nvPr/>
-        </p:nvSpPr>
-        <p:spPr>
-          <a:xfrm>
-            <a:off x="8229600" y="6400800"/>
-            <a:ext cx="3657600" cy="274320"/>
-          </a:xfrm>
-          <a:prstGeom prst="rect">
-            <a:avLst/>
-          </a:prstGeom>
-          <a:noFill/>
-          <a:ln/>
-        </p:spPr>
-        <p:txBody>
-          <a:bodyPr wrap="square" rtlCol="0" anchor="ctr"/>
-          <a:lstStyle/>
-          <a:p>
-            <a:pPr algn="r" indent="0" marL="0">
-              <a:buNone/>
-            </a:pPr>
-            <a:r>
-              <a:rPr lang="en-US" sz="800" dirty="0">
-                <a:solidFill>
-                  <a:srgbClr val="8B8FA3"/>
-                </a:solidFill>
-              </a:rPr>
-              <a:t>datacendia.com</a:t>
-            </a:r>
-            <a:endParaRPr lang="en-US" sz="800" dirty="0"/>
-          </a:p>
-        </p:txBody>
-      </p:sp>
       <p:pic>
         <p:nvPicPr>
-          <p:cNvPr id="10" name="Picture 9" descr="image.png"/>
+          <p:cNvPr id="7" name="Image 0" descr="preencoded.png">    </p:cNvPr>
           <p:cNvPicPr>
             <a:picLocks noChangeAspect="1"/>
           </p:cNvPicPr>
@@ -4826,14 +4658,86 @@
         </p:blipFill>
         <p:spPr>
           <a:xfrm>
-            <a:off x="6885432" y="1371600"/>
-            <a:ext cx="5029200" cy="3108960"/>
+            <a:off x="5303520" y="1097280"/>
+            <a:ext cx="6400800" cy="4846320"/>
           </a:xfrm>
           <a:prstGeom prst="rect">
             <a:avLst/>
           </a:prstGeom>
         </p:spPr>
       </p:pic>
+      <p:sp>
+        <p:nvSpPr>
+          <p:cNvPr id="8" name="Text 5"/>
+          <p:cNvSpPr/>
+          <p:nvPr/>
+        </p:nvSpPr>
+        <p:spPr>
+          <a:xfrm>
+            <a:off x="457200" y="6400800"/>
+            <a:ext cx="3657600" cy="274320"/>
+          </a:xfrm>
+          <a:prstGeom prst="rect">
+            <a:avLst/>
+          </a:prstGeom>
+          <a:noFill/>
+          <a:ln/>
+        </p:spPr>
+        <p:txBody>
+          <a:bodyPr wrap="square" rtlCol="0" anchor="ctr"/>
+          <a:lstStyle/>
+          <a:p>
+            <a:pPr indent="0" marL="0">
+              <a:buNone/>
+            </a:pPr>
+            <a:r>
+              <a:rPr lang="en-US" sz="800" dirty="0">
+                <a:solidFill>
+                  <a:srgbClr val="8B8FA3"/>
+                </a:solidFill>
+              </a:rPr>
+              <a:t>© 2024-2026 Datacendia, LLC</a:t>
+            </a:r>
+            <a:endParaRPr lang="en-US" sz="800" dirty="0"/>
+          </a:p>
+        </p:txBody>
+      </p:sp>
+      <p:sp>
+        <p:nvSpPr>
+          <p:cNvPr id="9" name="Text 6"/>
+          <p:cNvSpPr/>
+          <p:nvPr/>
+        </p:nvSpPr>
+        <p:spPr>
+          <a:xfrm>
+            <a:off x="8229600" y="6400800"/>
+            <a:ext cx="3657600" cy="274320"/>
+          </a:xfrm>
+          <a:prstGeom prst="rect">
+            <a:avLst/>
+          </a:prstGeom>
+          <a:noFill/>
+          <a:ln/>
+        </p:spPr>
+        <p:txBody>
+          <a:bodyPr wrap="square" rtlCol="0" anchor="ctr"/>
+          <a:lstStyle/>
+          <a:p>
+            <a:pPr algn="r" indent="0" marL="0">
+              <a:buNone/>
+            </a:pPr>
+            <a:r>
+              <a:rPr lang="en-US" sz="800" dirty="0">
+                <a:solidFill>
+                  <a:srgbClr val="8B8FA3"/>
+                </a:solidFill>
+              </a:rPr>
+              <a:t>datacendia.com</a:t>
+            </a:r>
+            <a:endParaRPr lang="en-US" sz="800" dirty="0"/>
+          </a:p>
+        </p:txBody>
+      </p:sp>
     </p:spTree>
   </p:cSld>
   <p:clrMapOvr>
@@ -5230,30 +5134,6 @@
           </a:p>
         </p:txBody>
       </p:sp>
-      <p:pic>
-        <p:nvPicPr>
-          <p:cNvPr id="9" name="Picture 8" descr="image.png"/>
-          <p:cNvPicPr>
-            <a:picLocks noChangeAspect="1"/>
-          </p:cNvPicPr>
-          <p:nvPr/>
-        </p:nvPicPr>
-        <p:blipFill>
-          <a:blip r:embed="rId3"/>
-          <a:stretch>
-            <a:fillRect/>
-          </a:stretch>
-        </p:blipFill>
-        <p:spPr>
-          <a:xfrm>
-            <a:off x="6885432" y="1371600"/>
-            <a:ext cx="5029200" cy="3108960"/>
-          </a:xfrm>
-          <a:prstGeom prst="rect">
-            <a:avLst/>
-          </a:prstGeom>
-        </p:spPr>
-      </p:pic>
     </p:spTree>
   </p:cSld>
   <p:clrMapOvr>
@@ -5614,30 +5494,6 @@
           </a:p>
         </p:txBody>
       </p:sp>
-      <p:pic>
-        <p:nvPicPr>
-          <p:cNvPr id="8" name="Picture 7" descr="15-chronos.png"/>
-          <p:cNvPicPr>
-            <a:picLocks noChangeAspect="1"/>
-          </p:cNvPicPr>
-          <p:nvPr/>
-        </p:nvPicPr>
-        <p:blipFill>
-          <a:blip r:embed="rId3"/>
-          <a:stretch>
-            <a:fillRect/>
-          </a:stretch>
-        </p:blipFill>
-        <p:spPr>
-          <a:xfrm>
-            <a:off x="6885432" y="1371600"/>
-            <a:ext cx="5029200" cy="3108960"/>
-          </a:xfrm>
-          <a:prstGeom prst="rect">
-            <a:avLst/>
-          </a:prstGeom>
-        </p:spPr>
-      </p:pic>
     </p:spTree>
   </p:cSld>
   <p:clrMapOvr>
@@ -5886,30 +5742,6 @@
           </a:p>
         </p:txBody>
       </p:sp>
-      <p:pic>
-        <p:nvPicPr>
-          <p:cNvPr id="8" name="Picture 7" descr="image.png"/>
-          <p:cNvPicPr>
-            <a:picLocks noChangeAspect="1"/>
-          </p:cNvPicPr>
-          <p:nvPr/>
-        </p:nvPicPr>
-        <p:blipFill>
-          <a:blip r:embed="rId3"/>
-          <a:stretch>
-            <a:fillRect/>
-          </a:stretch>
-        </p:blipFill>
-        <p:spPr>
-          <a:xfrm>
-            <a:off x="6885432" y="1371600"/>
-            <a:ext cx="5029200" cy="3108960"/>
-          </a:xfrm>
-          <a:prstGeom prst="rect">
-            <a:avLst/>
-          </a:prstGeom>
-        </p:spPr>
-      </p:pic>
     </p:spTree>
   </p:cSld>
   <p:clrMapOvr>
@@ -6107,10 +5939,6 @@
           </a:solidFill>
           <a:ln/>
         </p:spPr>
-        <p:txBody>
-          <a:bodyPr/>
-          <a:p/>
-        </p:txBody>
       </p:sp>
       <p:sp>
         <p:nvSpPr>
@@ -6205,10 +6033,6 @@
           </a:solidFill>
           <a:ln/>
         </p:spPr>
-        <p:txBody>
-          <a:bodyPr/>
-          <a:p/>
-        </p:txBody>
       </p:sp>
       <p:sp>
         <p:nvSpPr>
@@ -6303,10 +6127,6 @@
           </a:solidFill>
           <a:ln/>
         </p:spPr>
-        <p:txBody>
-          <a:bodyPr/>
-          <a:p/>
-        </p:txBody>
       </p:sp>
       <p:sp>
         <p:nvSpPr>
@@ -6401,10 +6221,6 @@
           </a:solidFill>
           <a:ln/>
         </p:spPr>
-        <p:txBody>
-          <a:bodyPr/>
-          <a:p/>
-        </p:txBody>
       </p:sp>
       <p:sp>
         <p:nvSpPr>
@@ -6499,10 +6315,6 @@
           </a:solidFill>
           <a:ln/>
         </p:spPr>
-        <p:txBody>
-          <a:bodyPr/>
-          <a:p/>
-        </p:txBody>
       </p:sp>
       <p:sp>
         <p:nvSpPr>
@@ -6597,10 +6409,6 @@
           </a:solidFill>
           <a:ln/>
         </p:spPr>
-        <p:txBody>
-          <a:bodyPr/>
-          <a:p/>
-        </p:txBody>
       </p:sp>
       <p:sp>
         <p:nvSpPr>
@@ -6695,10 +6503,6 @@
           </a:solidFill>
           <a:ln/>
         </p:spPr>
-        <p:txBody>
-          <a:bodyPr/>
-          <a:p/>
-        </p:txBody>
       </p:sp>
       <p:sp>
         <p:nvSpPr>
@@ -6793,10 +6597,6 @@
           </a:solidFill>
           <a:ln/>
         </p:spPr>
-        <p:txBody>
-          <a:bodyPr/>
-          <a:p/>
-        </p:txBody>
       </p:sp>
       <p:sp>
         <p:nvSpPr>
@@ -6942,30 +6742,6 @@
           </a:p>
         </p:txBody>
       </p:sp>
-      <p:pic>
-        <p:nvPicPr>
-          <p:cNvPr id="32" name="Picture 31" descr="image.png"/>
-          <p:cNvPicPr>
-            <a:picLocks noChangeAspect="1"/>
-          </p:cNvPicPr>
-          <p:nvPr/>
-        </p:nvPicPr>
-        <p:blipFill>
-          <a:blip r:embed="rId3"/>
-          <a:stretch>
-            <a:fillRect/>
-          </a:stretch>
-        </p:blipFill>
-        <p:spPr>
-          <a:xfrm>
-            <a:off x="6885432" y="1371600"/>
-            <a:ext cx="5029200" cy="3108960"/>
-          </a:xfrm>
-          <a:prstGeom prst="rect">
-            <a:avLst/>
-          </a:prstGeom>
-        </p:spPr>
-      </p:pic>
     </p:spTree>
   </p:cSld>
   <p:clrMapOvr>
@@ -7290,30 +7066,6 @@
           </a:p>
         </p:txBody>
       </p:sp>
-      <p:pic>
-        <p:nvPicPr>
-          <p:cNvPr id="9" name="Picture 8" descr="16-redteam.png"/>
-          <p:cNvPicPr>
-            <a:picLocks noChangeAspect="1"/>
-          </p:cNvPicPr>
-          <p:nvPr/>
-        </p:nvPicPr>
-        <p:blipFill>
-          <a:blip r:embed="rId3"/>
-          <a:stretch>
-            <a:fillRect/>
-          </a:stretch>
-        </p:blipFill>
-        <p:spPr>
-          <a:xfrm>
-            <a:off x="6885432" y="1371600"/>
-            <a:ext cx="5029200" cy="3108960"/>
-          </a:xfrm>
-          <a:prstGeom prst="rect">
-            <a:avLst/>
-          </a:prstGeom>
-        </p:spPr>
-      </p:pic>
     </p:spTree>
   </p:cSld>
   <p:clrMapOvr>
@@ -7850,30 +7602,6 @@
           </a:p>
         </p:txBody>
       </p:sp>
-      <p:pic>
-        <p:nvPicPr>
-          <p:cNvPr id="8" name="Picture 7" descr="31-sovereign.png"/>
-          <p:cNvPicPr>
-            <a:picLocks noChangeAspect="1"/>
-          </p:cNvPicPr>
-          <p:nvPr/>
-        </p:nvPicPr>
-        <p:blipFill>
-          <a:blip r:embed="rId3"/>
-          <a:stretch>
-            <a:fillRect/>
-          </a:stretch>
-        </p:blipFill>
-        <p:spPr>
-          <a:xfrm>
-            <a:off x="6885432" y="1371600"/>
-            <a:ext cx="5029200" cy="3108960"/>
-          </a:xfrm>
-          <a:prstGeom prst="rect">
-            <a:avLst/>
-          </a:prstGeom>
-        </p:spPr>
-      </p:pic>
     </p:spTree>
   </p:cSld>
   <p:clrMapOvr>

--- a/docs/pitch-decks/gamma/pptx/01-investor-overview.pptx
+++ b/docs/pitch-decks/gamma/pptx/01-investor-overview.pptx
@@ -4294,9 +4294,81 @@
           </a:p>
         </p:txBody>
       </p:sp>
+      <p:sp>
+        <p:nvSpPr>
+          <p:cNvPr id="8" name="Text 5"/>
+          <p:cNvSpPr/>
+          <p:nvPr/>
+        </p:nvSpPr>
+        <p:spPr>
+          <a:xfrm>
+            <a:off x="457200" y="6400800"/>
+            <a:ext cx="3657600" cy="274320"/>
+          </a:xfrm>
+          <a:prstGeom prst="rect">
+            <a:avLst/>
+          </a:prstGeom>
+          <a:noFill/>
+          <a:ln/>
+        </p:spPr>
+        <p:txBody>
+          <a:bodyPr wrap="square" rtlCol="0" anchor="ctr"/>
+          <a:lstStyle/>
+          <a:p>
+            <a:pPr indent="0" marL="0">
+              <a:buNone/>
+            </a:pPr>
+            <a:r>
+              <a:rPr lang="en-US" sz="800" dirty="0">
+                <a:solidFill>
+                  <a:srgbClr val="8B8FA3"/>
+                </a:solidFill>
+              </a:rPr>
+              <a:t>© 2024-2026 Datacendia, LLC</a:t>
+            </a:r>
+            <a:endParaRPr lang="en-US" sz="800" dirty="0"/>
+          </a:p>
+        </p:txBody>
+      </p:sp>
+      <p:sp>
+        <p:nvSpPr>
+          <p:cNvPr id="9" name="Text 6"/>
+          <p:cNvSpPr/>
+          <p:nvPr/>
+        </p:nvSpPr>
+        <p:spPr>
+          <a:xfrm>
+            <a:off x="8229600" y="6400800"/>
+            <a:ext cx="3657600" cy="274320"/>
+          </a:xfrm>
+          <a:prstGeom prst="rect">
+            <a:avLst/>
+          </a:prstGeom>
+          <a:noFill/>
+          <a:ln/>
+        </p:spPr>
+        <p:txBody>
+          <a:bodyPr wrap="square" rtlCol="0" anchor="ctr"/>
+          <a:lstStyle/>
+          <a:p>
+            <a:pPr algn="r" indent="0" marL="0">
+              <a:buNone/>
+            </a:pPr>
+            <a:r>
+              <a:rPr lang="en-US" sz="800" dirty="0">
+                <a:solidFill>
+                  <a:srgbClr val="8B8FA3"/>
+                </a:solidFill>
+              </a:rPr>
+              <a:t>datacendia.com</a:t>
+            </a:r>
+            <a:endParaRPr lang="en-US" sz="800" dirty="0"/>
+          </a:p>
+        </p:txBody>
+      </p:sp>
       <p:pic>
         <p:nvPicPr>
-          <p:cNvPr id="7" name="Image 0" descr="preencoded.png">    </p:cNvPr>
+          <p:cNvPr id="10" name="Picture 9" descr="image.png"/>
           <p:cNvPicPr>
             <a:picLocks noChangeAspect="1"/>
           </p:cNvPicPr>
@@ -4318,78 +4390,6 @@
           </a:prstGeom>
         </p:spPr>
       </p:pic>
-      <p:sp>
-        <p:nvSpPr>
-          <p:cNvPr id="8" name="Text 5"/>
-          <p:cNvSpPr/>
-          <p:nvPr/>
-        </p:nvSpPr>
-        <p:spPr>
-          <a:xfrm>
-            <a:off x="457200" y="6400800"/>
-            <a:ext cx="3657600" cy="274320"/>
-          </a:xfrm>
-          <a:prstGeom prst="rect">
-            <a:avLst/>
-          </a:prstGeom>
-          <a:noFill/>
-          <a:ln/>
-        </p:spPr>
-        <p:txBody>
-          <a:bodyPr wrap="square" rtlCol="0" anchor="ctr"/>
-          <a:lstStyle/>
-          <a:p>
-            <a:pPr indent="0" marL="0">
-              <a:buNone/>
-            </a:pPr>
-            <a:r>
-              <a:rPr lang="en-US" sz="800" dirty="0">
-                <a:solidFill>
-                  <a:srgbClr val="8B8FA3"/>
-                </a:solidFill>
-              </a:rPr>
-              <a:t>© 2024-2026 Datacendia, LLC</a:t>
-            </a:r>
-            <a:endParaRPr lang="en-US" sz="800" dirty="0"/>
-          </a:p>
-        </p:txBody>
-      </p:sp>
-      <p:sp>
-        <p:nvSpPr>
-          <p:cNvPr id="9" name="Text 6"/>
-          <p:cNvSpPr/>
-          <p:nvPr/>
-        </p:nvSpPr>
-        <p:spPr>
-          <a:xfrm>
-            <a:off x="8229600" y="6400800"/>
-            <a:ext cx="3657600" cy="274320"/>
-          </a:xfrm>
-          <a:prstGeom prst="rect">
-            <a:avLst/>
-          </a:prstGeom>
-          <a:noFill/>
-          <a:ln/>
-        </p:spPr>
-        <p:txBody>
-          <a:bodyPr wrap="square" rtlCol="0" anchor="ctr"/>
-          <a:lstStyle/>
-          <a:p>
-            <a:pPr algn="r" indent="0" marL="0">
-              <a:buNone/>
-            </a:pPr>
-            <a:r>
-              <a:rPr lang="en-US" sz="800" dirty="0">
-                <a:solidFill>
-                  <a:srgbClr val="8B8FA3"/>
-                </a:solidFill>
-              </a:rPr>
-              <a:t>datacendia.com</a:t>
-            </a:r>
-            <a:endParaRPr lang="en-US" sz="800" dirty="0"/>
-          </a:p>
-        </p:txBody>
-      </p:sp>
     </p:spTree>
   </p:cSld>
   <p:clrMapOvr>
@@ -4642,9 +4642,81 @@
           </a:p>
         </p:txBody>
       </p:sp>
+      <p:sp>
+        <p:nvSpPr>
+          <p:cNvPr id="8" name="Text 5"/>
+          <p:cNvSpPr/>
+          <p:nvPr/>
+        </p:nvSpPr>
+        <p:spPr>
+          <a:xfrm>
+            <a:off x="457200" y="6400800"/>
+            <a:ext cx="3657600" cy="274320"/>
+          </a:xfrm>
+          <a:prstGeom prst="rect">
+            <a:avLst/>
+          </a:prstGeom>
+          <a:noFill/>
+          <a:ln/>
+        </p:spPr>
+        <p:txBody>
+          <a:bodyPr wrap="square" rtlCol="0" anchor="ctr"/>
+          <a:lstStyle/>
+          <a:p>
+            <a:pPr indent="0" marL="0">
+              <a:buNone/>
+            </a:pPr>
+            <a:r>
+              <a:rPr lang="en-US" sz="800" dirty="0">
+                <a:solidFill>
+                  <a:srgbClr val="8B8FA3"/>
+                </a:solidFill>
+              </a:rPr>
+              <a:t>© 2024-2026 Datacendia, LLC</a:t>
+            </a:r>
+            <a:endParaRPr lang="en-US" sz="800" dirty="0"/>
+          </a:p>
+        </p:txBody>
+      </p:sp>
+      <p:sp>
+        <p:nvSpPr>
+          <p:cNvPr id="9" name="Text 6"/>
+          <p:cNvSpPr/>
+          <p:nvPr/>
+        </p:nvSpPr>
+        <p:spPr>
+          <a:xfrm>
+            <a:off x="8229600" y="6400800"/>
+            <a:ext cx="3657600" cy="274320"/>
+          </a:xfrm>
+          <a:prstGeom prst="rect">
+            <a:avLst/>
+          </a:prstGeom>
+          <a:noFill/>
+          <a:ln/>
+        </p:spPr>
+        <p:txBody>
+          <a:bodyPr wrap="square" rtlCol="0" anchor="ctr"/>
+          <a:lstStyle/>
+          <a:p>
+            <a:pPr algn="r" indent="0" marL="0">
+              <a:buNone/>
+            </a:pPr>
+            <a:r>
+              <a:rPr lang="en-US" sz="800" dirty="0">
+                <a:solidFill>
+                  <a:srgbClr val="8B8FA3"/>
+                </a:solidFill>
+              </a:rPr>
+              <a:t>datacendia.com</a:t>
+            </a:r>
+            <a:endParaRPr lang="en-US" sz="800" dirty="0"/>
+          </a:p>
+        </p:txBody>
+      </p:sp>
       <p:pic>
         <p:nvPicPr>
-          <p:cNvPr id="7" name="Image 0" descr="preencoded.png">    </p:cNvPr>
+          <p:cNvPr id="10" name="Picture 9" descr="image.png"/>
           <p:cNvPicPr>
             <a:picLocks noChangeAspect="1"/>
           </p:cNvPicPr>
@@ -4666,78 +4738,6 @@
           </a:prstGeom>
         </p:spPr>
       </p:pic>
-      <p:sp>
-        <p:nvSpPr>
-          <p:cNvPr id="8" name="Text 5"/>
-          <p:cNvSpPr/>
-          <p:nvPr/>
-        </p:nvSpPr>
-        <p:spPr>
-          <a:xfrm>
-            <a:off x="457200" y="6400800"/>
-            <a:ext cx="3657600" cy="274320"/>
-          </a:xfrm>
-          <a:prstGeom prst="rect">
-            <a:avLst/>
-          </a:prstGeom>
-          <a:noFill/>
-          <a:ln/>
-        </p:spPr>
-        <p:txBody>
-          <a:bodyPr wrap="square" rtlCol="0" anchor="ctr"/>
-          <a:lstStyle/>
-          <a:p>
-            <a:pPr indent="0" marL="0">
-              <a:buNone/>
-            </a:pPr>
-            <a:r>
-              <a:rPr lang="en-US" sz="800" dirty="0">
-                <a:solidFill>
-                  <a:srgbClr val="8B8FA3"/>
-                </a:solidFill>
-              </a:rPr>
-              <a:t>© 2024-2026 Datacendia, LLC</a:t>
-            </a:r>
-            <a:endParaRPr lang="en-US" sz="800" dirty="0"/>
-          </a:p>
-        </p:txBody>
-      </p:sp>
-      <p:sp>
-        <p:nvSpPr>
-          <p:cNvPr id="9" name="Text 6"/>
-          <p:cNvSpPr/>
-          <p:nvPr/>
-        </p:nvSpPr>
-        <p:spPr>
-          <a:xfrm>
-            <a:off x="8229600" y="6400800"/>
-            <a:ext cx="3657600" cy="274320"/>
-          </a:xfrm>
-          <a:prstGeom prst="rect">
-            <a:avLst/>
-          </a:prstGeom>
-          <a:noFill/>
-          <a:ln/>
-        </p:spPr>
-        <p:txBody>
-          <a:bodyPr wrap="square" rtlCol="0" anchor="ctr"/>
-          <a:lstStyle/>
-          <a:p>
-            <a:pPr algn="r" indent="0" marL="0">
-              <a:buNone/>
-            </a:pPr>
-            <a:r>
-              <a:rPr lang="en-US" sz="800" dirty="0">
-                <a:solidFill>
-                  <a:srgbClr val="8B8FA3"/>
-                </a:solidFill>
-              </a:rPr>
-              <a:t>datacendia.com</a:t>
-            </a:r>
-            <a:endParaRPr lang="en-US" sz="800" dirty="0"/>
-          </a:p>
-        </p:txBody>
-      </p:sp>
     </p:spTree>
   </p:cSld>
   <p:clrMapOvr>

--- a/docs/pitch-decks/gamma/pptx/01-investor-overview.pptx
+++ b/docs/pitch-decks/gamma/pptx/01-investor-overview.pptx
@@ -2348,7 +2348,7 @@
                   <a:srgbClr val="FFFFFF"/>
                 </a:solidFill>
               </a:rPr>
-              <a:t>Decision CrisisImmunizationInfrastructure</a:t>
+              <a:t>Decision Evidence Infrastructure for AI Systems</a:t>
             </a:r>
             <a:endParaRPr lang="en-US" sz="2400" dirty="0"/>
           </a:p>

--- a/docs/pitch-decks/gamma/pptx/01-investor-overview.pptx
+++ b/docs/pitch-decks/gamma/pptx/01-investor-overview.pptx
@@ -7862,6 +7862,24 @@
                   <a:srgbClr val="8B8FA3"/>
                 </a:solidFill>
               </a:rPr>
+              <a:t>Community  Free (Apache 2.0, open-source)</a:t>
+            </a:r>
+            <a:endParaRPr lang="en-US" sz="1200" dirty="0"/>
+          </a:p>
+          <a:p>
+            <a:pPr marL="342900" indent="-342900">
+              <a:lnSpc>
+                <a:spcPct val="150000"/>
+              </a:lnSpc>
+              <a:buSzPct val="100000"/>
+              <a:buChar char="→"/>
+            </a:pPr>
+            <a:r>
+              <a:rPr lang="en-US" sz="1200" dirty="0">
+                <a:solidFill>
+                  <a:srgbClr val="8B8FA3"/>
+                </a:solidFill>
+              </a:rPr>
               <a:t>Gross margin &gt;80%. Net dollar retention &gt;130%. CAC payback &lt;18 months. LTV:CAC &gt;5x. Land with Pilot, expand to Enterprise.</a:t>
             </a:r>
             <a:endParaRPr lang="en-US" sz="1200" dirty="0"/>
